--- a/HL-3_MIR/HL3 MIR optical design.pptx
+++ b/HL-3_MIR/HL3 MIR optical design.pptx
@@ -7,6 +7,8 @@
   <p:sldIdLst>
     <p:sldId id="256" r:id="rId2"/>
     <p:sldId id="257" r:id="rId3"/>
+    <p:sldId id="258" r:id="rId4"/>
+    <p:sldId id="259" r:id="rId5"/>
   </p:sldIdLst>
   <p:sldSz cx="12192000" cy="6858000"/>
   <p:notesSz cx="6858000" cy="9144000"/>
@@ -105,6 +107,11 @@
       </a:defRPr>
     </a:lvl9pPr>
   </p:defaultTextStyle>
+  <p:extLst>
+    <p:ext uri="{EFAFB233-063F-42B5-8137-9DF3F51BA10A}">
+      <p15:sldGuideLst xmlns:p15="http://schemas.microsoft.com/office/powerpoint/2012/main"/>
+    </p:ext>
+  </p:extLst>
 </p:presentation>
 </file>
 
@@ -255,7 +262,7 @@
           <a:p>
             <a:fld id="{10DDEDA3-862F-4128-8CEC-671079D2D72D}" type="datetimeFigureOut">
               <a:rPr lang="zh-CN" altLang="en-US" smtClean="0"/>
-              <a:t>2026/8/12</a:t>
+              <a:t>2026/9/2</a:t>
             </a:fld>
             <a:endParaRPr lang="zh-CN" altLang="en-US"/>
           </a:p>
@@ -453,7 +460,7 @@
           <a:p>
             <a:fld id="{10DDEDA3-862F-4128-8CEC-671079D2D72D}" type="datetimeFigureOut">
               <a:rPr lang="zh-CN" altLang="en-US" smtClean="0"/>
-              <a:t>2026/8/12</a:t>
+              <a:t>2026/9/2</a:t>
             </a:fld>
             <a:endParaRPr lang="zh-CN" altLang="en-US"/>
           </a:p>
@@ -661,7 +668,7 @@
           <a:p>
             <a:fld id="{10DDEDA3-862F-4128-8CEC-671079D2D72D}" type="datetimeFigureOut">
               <a:rPr lang="zh-CN" altLang="en-US" smtClean="0"/>
-              <a:t>2026/8/12</a:t>
+              <a:t>2026/9/2</a:t>
             </a:fld>
             <a:endParaRPr lang="zh-CN" altLang="en-US"/>
           </a:p>
@@ -859,7 +866,7 @@
           <a:p>
             <a:fld id="{10DDEDA3-862F-4128-8CEC-671079D2D72D}" type="datetimeFigureOut">
               <a:rPr lang="zh-CN" altLang="en-US" smtClean="0"/>
-              <a:t>2026/8/12</a:t>
+              <a:t>2026/9/2</a:t>
             </a:fld>
             <a:endParaRPr lang="zh-CN" altLang="en-US"/>
           </a:p>
@@ -1134,7 +1141,7 @@
           <a:p>
             <a:fld id="{10DDEDA3-862F-4128-8CEC-671079D2D72D}" type="datetimeFigureOut">
               <a:rPr lang="zh-CN" altLang="en-US" smtClean="0"/>
-              <a:t>2026/8/12</a:t>
+              <a:t>2026/9/2</a:t>
             </a:fld>
             <a:endParaRPr lang="zh-CN" altLang="en-US"/>
           </a:p>
@@ -1399,7 +1406,7 @@
           <a:p>
             <a:fld id="{10DDEDA3-862F-4128-8CEC-671079D2D72D}" type="datetimeFigureOut">
               <a:rPr lang="zh-CN" altLang="en-US" smtClean="0"/>
-              <a:t>2026/8/12</a:t>
+              <a:t>2026/9/2</a:t>
             </a:fld>
             <a:endParaRPr lang="zh-CN" altLang="en-US"/>
           </a:p>
@@ -1811,7 +1818,7 @@
           <a:p>
             <a:fld id="{10DDEDA3-862F-4128-8CEC-671079D2D72D}" type="datetimeFigureOut">
               <a:rPr lang="zh-CN" altLang="en-US" smtClean="0"/>
-              <a:t>2026/8/12</a:t>
+              <a:t>2026/9/2</a:t>
             </a:fld>
             <a:endParaRPr lang="zh-CN" altLang="en-US"/>
           </a:p>
@@ -1952,7 +1959,7 @@
           <a:p>
             <a:fld id="{10DDEDA3-862F-4128-8CEC-671079D2D72D}" type="datetimeFigureOut">
               <a:rPr lang="zh-CN" altLang="en-US" smtClean="0"/>
-              <a:t>2026/8/12</a:t>
+              <a:t>2026/9/2</a:t>
             </a:fld>
             <a:endParaRPr lang="zh-CN" altLang="en-US"/>
           </a:p>
@@ -2065,7 +2072,7 @@
           <a:p>
             <a:fld id="{10DDEDA3-862F-4128-8CEC-671079D2D72D}" type="datetimeFigureOut">
               <a:rPr lang="zh-CN" altLang="en-US" smtClean="0"/>
-              <a:t>2026/8/12</a:t>
+              <a:t>2026/9/2</a:t>
             </a:fld>
             <a:endParaRPr lang="zh-CN" altLang="en-US"/>
           </a:p>
@@ -2376,7 +2383,7 @@
           <a:p>
             <a:fld id="{10DDEDA3-862F-4128-8CEC-671079D2D72D}" type="datetimeFigureOut">
               <a:rPr lang="zh-CN" altLang="en-US" smtClean="0"/>
-              <a:t>2026/8/12</a:t>
+              <a:t>2026/9/2</a:t>
             </a:fld>
             <a:endParaRPr lang="zh-CN" altLang="en-US"/>
           </a:p>
@@ -2664,7 +2671,7 @@
           <a:p>
             <a:fld id="{10DDEDA3-862F-4128-8CEC-671079D2D72D}" type="datetimeFigureOut">
               <a:rPr lang="zh-CN" altLang="en-US" smtClean="0"/>
-              <a:t>2026/8/12</a:t>
+              <a:t>2026/9/2</a:t>
             </a:fld>
             <a:endParaRPr lang="zh-CN" altLang="en-US"/>
           </a:p>
@@ -2905,7 +2912,7 @@
           <a:p>
             <a:fld id="{10DDEDA3-862F-4128-8CEC-671079D2D72D}" type="datetimeFigureOut">
               <a:rPr lang="zh-CN" altLang="en-US" smtClean="0"/>
-              <a:t>2026/8/12</a:t>
+              <a:t>2026/9/2</a:t>
             </a:fld>
             <a:endParaRPr lang="zh-CN" altLang="en-US"/>
           </a:p>
@@ -3499,6 +3506,1142 @@
     <p:extLst>
       <p:ext uri="{BB962C8B-B14F-4D97-AF65-F5344CB8AC3E}">
         <p14:creationId xmlns:p14="http://schemas.microsoft.com/office/powerpoint/2010/main" val="3851520260"/>
+      </p:ext>
+    </p:extLst>
+  </p:cSld>
+  <p:clrMapOvr>
+    <a:masterClrMapping/>
+  </p:clrMapOvr>
+</p:sld>
+</file>
+
+<file path=ppt/slides/slide3.xml><?xml version="1.0" encoding="utf-8"?>
+<p:sld xmlns:a="http://schemas.openxmlformats.org/drawingml/2006/main" xmlns:r="http://schemas.openxmlformats.org/officeDocument/2006/relationships" xmlns:p="http://schemas.openxmlformats.org/presentationml/2006/main">
+  <p:cSld>
+    <p:spTree>
+      <p:nvGrpSpPr>
+        <p:cNvPr id="1" name=""/>
+        <p:cNvGrpSpPr/>
+        <p:nvPr/>
+      </p:nvGrpSpPr>
+      <p:grpSpPr>
+        <a:xfrm>
+          <a:off x="0" y="0"/>
+          <a:ext cx="0" cy="0"/>
+          <a:chOff x="0" y="0"/>
+          <a:chExt cx="0" cy="0"/>
+        </a:xfrm>
+      </p:grpSpPr>
+      <p:grpSp>
+        <p:nvGrpSpPr>
+          <p:cNvPr id="57" name="组合 56">
+            <a:extLst>
+              <a:ext uri="{FF2B5EF4-FFF2-40B4-BE49-F238E27FC236}">
+                <a16:creationId xmlns:a16="http://schemas.microsoft.com/office/drawing/2014/main" id="{B8AA07B6-C16F-DE4C-52C8-B975DC401992}"/>
+              </a:ext>
+            </a:extLst>
+          </p:cNvPr>
+          <p:cNvGrpSpPr/>
+          <p:nvPr/>
+        </p:nvGrpSpPr>
+        <p:grpSpPr>
+          <a:xfrm>
+            <a:off x="550984" y="997428"/>
+            <a:ext cx="10933724" cy="3208525"/>
+            <a:chOff x="109415" y="1138105"/>
+            <a:chExt cx="10933724" cy="3208525"/>
+          </a:xfrm>
+        </p:grpSpPr>
+        <p:pic>
+          <p:nvPicPr>
+            <p:cNvPr id="5" name="图片 4">
+              <a:extLst>
+                <a:ext uri="{FF2B5EF4-FFF2-40B4-BE49-F238E27FC236}">
+                  <a16:creationId xmlns:a16="http://schemas.microsoft.com/office/drawing/2014/main" id="{87D6EA41-DBE5-BE36-402D-7B7E30022040}"/>
+                </a:ext>
+              </a:extLst>
+            </p:cNvPr>
+            <p:cNvPicPr>
+              <a:picLocks noChangeAspect="1"/>
+            </p:cNvPicPr>
+            <p:nvPr/>
+          </p:nvPicPr>
+          <p:blipFill>
+            <a:blip r:embed="rId2">
+              <a:clrChange>
+                <a:clrFrom>
+                  <a:srgbClr val="73737F"/>
+                </a:clrFrom>
+                <a:clrTo>
+                  <a:srgbClr val="73737F">
+                    <a:alpha val="0"/>
+                  </a:srgbClr>
+                </a:clrTo>
+              </a:clrChange>
+            </a:blip>
+            <a:stretch>
+              <a:fillRect/>
+            </a:stretch>
+          </p:blipFill>
+          <p:spPr>
+            <a:xfrm>
+              <a:off x="515816" y="1138105"/>
+              <a:ext cx="10050584" cy="3208525"/>
+            </a:xfrm>
+            <a:prstGeom prst="rect">
+              <a:avLst/>
+            </a:prstGeom>
+          </p:spPr>
+        </p:pic>
+        <p:cxnSp>
+          <p:nvCxnSpPr>
+            <p:cNvPr id="7" name="直接连接符 6">
+              <a:extLst>
+                <a:ext uri="{FF2B5EF4-FFF2-40B4-BE49-F238E27FC236}">
+                  <a16:creationId xmlns:a16="http://schemas.microsoft.com/office/drawing/2014/main" id="{1C7B2BB1-014D-4BED-F195-E02F2A30EC50}"/>
+                </a:ext>
+              </a:extLst>
+            </p:cNvPr>
+            <p:cNvCxnSpPr>
+              <a:cxnSpLocks/>
+            </p:cNvCxnSpPr>
+            <p:nvPr/>
+          </p:nvCxnSpPr>
+          <p:spPr>
+            <a:xfrm>
+              <a:off x="992553" y="1723292"/>
+              <a:ext cx="0" cy="312616"/>
+            </a:xfrm>
+            <a:prstGeom prst="line">
+              <a:avLst/>
+            </a:prstGeom>
+            <a:ln>
+              <a:solidFill>
+                <a:schemeClr val="tx1"/>
+              </a:solidFill>
+            </a:ln>
+          </p:spPr>
+          <p:style>
+            <a:lnRef idx="2">
+              <a:schemeClr val="accent1"/>
+            </a:lnRef>
+            <a:fillRef idx="0">
+              <a:schemeClr val="accent1"/>
+            </a:fillRef>
+            <a:effectRef idx="1">
+              <a:schemeClr val="accent1"/>
+            </a:effectRef>
+            <a:fontRef idx="minor">
+              <a:schemeClr val="tx1"/>
+            </a:fontRef>
+          </p:style>
+        </p:cxnSp>
+        <p:cxnSp>
+          <p:nvCxnSpPr>
+            <p:cNvPr id="9" name="直接连接符 8">
+              <a:extLst>
+                <a:ext uri="{FF2B5EF4-FFF2-40B4-BE49-F238E27FC236}">
+                  <a16:creationId xmlns:a16="http://schemas.microsoft.com/office/drawing/2014/main" id="{4EC8B22F-BB67-AA49-14BA-41B980B44D1A}"/>
+                </a:ext>
+              </a:extLst>
+            </p:cNvPr>
+            <p:cNvCxnSpPr>
+              <a:cxnSpLocks/>
+            </p:cNvCxnSpPr>
+            <p:nvPr/>
+          </p:nvCxnSpPr>
+          <p:spPr>
+            <a:xfrm>
+              <a:off x="1484923" y="1723292"/>
+              <a:ext cx="0" cy="312616"/>
+            </a:xfrm>
+            <a:prstGeom prst="line">
+              <a:avLst/>
+            </a:prstGeom>
+            <a:ln>
+              <a:solidFill>
+                <a:schemeClr val="tx1"/>
+              </a:solidFill>
+            </a:ln>
+          </p:spPr>
+          <p:style>
+            <a:lnRef idx="2">
+              <a:schemeClr val="accent1"/>
+            </a:lnRef>
+            <a:fillRef idx="0">
+              <a:schemeClr val="accent1"/>
+            </a:fillRef>
+            <a:effectRef idx="1">
+              <a:schemeClr val="accent1"/>
+            </a:effectRef>
+            <a:fontRef idx="minor">
+              <a:schemeClr val="tx1"/>
+            </a:fontRef>
+          </p:style>
+        </p:cxnSp>
+        <p:cxnSp>
+          <p:nvCxnSpPr>
+            <p:cNvPr id="10" name="直接连接符 9">
+              <a:extLst>
+                <a:ext uri="{FF2B5EF4-FFF2-40B4-BE49-F238E27FC236}">
+                  <a16:creationId xmlns:a16="http://schemas.microsoft.com/office/drawing/2014/main" id="{0CD21DF0-EAEF-37B8-182B-3CCF67B117B7}"/>
+                </a:ext>
+              </a:extLst>
+            </p:cNvPr>
+            <p:cNvCxnSpPr>
+              <a:cxnSpLocks/>
+            </p:cNvCxnSpPr>
+            <p:nvPr/>
+          </p:nvCxnSpPr>
+          <p:spPr>
+            <a:xfrm>
+              <a:off x="742461" y="1723292"/>
+              <a:ext cx="0" cy="339970"/>
+            </a:xfrm>
+            <a:prstGeom prst="line">
+              <a:avLst/>
+            </a:prstGeom>
+            <a:ln>
+              <a:solidFill>
+                <a:schemeClr val="tx1"/>
+              </a:solidFill>
+            </a:ln>
+          </p:spPr>
+          <p:style>
+            <a:lnRef idx="2">
+              <a:schemeClr val="accent1"/>
+            </a:lnRef>
+            <a:fillRef idx="0">
+              <a:schemeClr val="accent1"/>
+            </a:fillRef>
+            <a:effectRef idx="1">
+              <a:schemeClr val="accent1"/>
+            </a:effectRef>
+            <a:fontRef idx="minor">
+              <a:schemeClr val="tx1"/>
+            </a:fontRef>
+          </p:style>
+        </p:cxnSp>
+        <p:sp>
+          <p:nvSpPr>
+            <p:cNvPr id="21" name="文本框 20">
+              <a:extLst>
+                <a:ext uri="{FF2B5EF4-FFF2-40B4-BE49-F238E27FC236}">
+                  <a16:creationId xmlns:a16="http://schemas.microsoft.com/office/drawing/2014/main" id="{BC3E6D5F-25E7-27ED-1680-B9112186C5BE}"/>
+                </a:ext>
+              </a:extLst>
+            </p:cNvPr>
+            <p:cNvSpPr txBox="1"/>
+            <p:nvPr/>
+          </p:nvSpPr>
+          <p:spPr>
+            <a:xfrm>
+              <a:off x="676030" y="1656862"/>
+              <a:ext cx="492369" cy="307777"/>
+            </a:xfrm>
+            <a:prstGeom prst="rect">
+              <a:avLst/>
+            </a:prstGeom>
+            <a:noFill/>
+          </p:spPr>
+          <p:txBody>
+            <a:bodyPr wrap="square" rtlCol="0">
+              <a:spAutoFit/>
+            </a:bodyPr>
+            <a:lstStyle/>
+            <a:p>
+              <a:r>
+                <a:rPr lang="en-US" altLang="zh-CN" sz="1400" dirty="0"/>
+                <a:t>s1</a:t>
+              </a:r>
+              <a:endParaRPr lang="zh-CN" altLang="en-US" sz="1400" dirty="0"/>
+            </a:p>
+          </p:txBody>
+        </p:sp>
+        <p:sp>
+          <p:nvSpPr>
+            <p:cNvPr id="22" name="文本框 21">
+              <a:extLst>
+                <a:ext uri="{FF2B5EF4-FFF2-40B4-BE49-F238E27FC236}">
+                  <a16:creationId xmlns:a16="http://schemas.microsoft.com/office/drawing/2014/main" id="{2DE3DD36-436A-68F7-9A6C-DFD20CBD93A2}"/>
+                </a:ext>
+              </a:extLst>
+            </p:cNvPr>
+            <p:cNvSpPr txBox="1"/>
+            <p:nvPr/>
+          </p:nvSpPr>
+          <p:spPr>
+            <a:xfrm>
+              <a:off x="1047260" y="1656861"/>
+              <a:ext cx="492369" cy="307777"/>
+            </a:xfrm>
+            <a:prstGeom prst="rect">
+              <a:avLst/>
+            </a:prstGeom>
+            <a:noFill/>
+          </p:spPr>
+          <p:txBody>
+            <a:bodyPr wrap="square" rtlCol="0">
+              <a:spAutoFit/>
+            </a:bodyPr>
+            <a:lstStyle/>
+            <a:p>
+              <a:r>
+                <a:rPr lang="en-US" altLang="zh-CN" sz="1400" dirty="0"/>
+                <a:t>s2</a:t>
+              </a:r>
+              <a:endParaRPr lang="zh-CN" altLang="en-US" sz="1400" dirty="0"/>
+            </a:p>
+          </p:txBody>
+        </p:sp>
+        <p:sp>
+          <p:nvSpPr>
+            <p:cNvPr id="23" name="文本框 22">
+              <a:extLst>
+                <a:ext uri="{FF2B5EF4-FFF2-40B4-BE49-F238E27FC236}">
+                  <a16:creationId xmlns:a16="http://schemas.microsoft.com/office/drawing/2014/main" id="{1CB29F83-B509-D7AE-15D2-AF973BC24616}"/>
+                </a:ext>
+              </a:extLst>
+            </p:cNvPr>
+            <p:cNvSpPr txBox="1"/>
+            <p:nvPr/>
+          </p:nvSpPr>
+          <p:spPr>
+            <a:xfrm>
+              <a:off x="109415" y="2585055"/>
+              <a:ext cx="812799" cy="338554"/>
+            </a:xfrm>
+            <a:prstGeom prst="rect">
+              <a:avLst/>
+            </a:prstGeom>
+            <a:noFill/>
+          </p:spPr>
+          <p:txBody>
+            <a:bodyPr wrap="square" rtlCol="0">
+              <a:spAutoFit/>
+            </a:bodyPr>
+            <a:lstStyle/>
+            <a:p>
+              <a:r>
+                <a:rPr lang="en-US" altLang="zh-CN" sz="1600" dirty="0"/>
+                <a:t>horn</a:t>
+              </a:r>
+              <a:endParaRPr lang="zh-CN" altLang="en-US" sz="1600" dirty="0"/>
+            </a:p>
+          </p:txBody>
+        </p:sp>
+        <p:cxnSp>
+          <p:nvCxnSpPr>
+            <p:cNvPr id="25" name="直接箭头连接符 24">
+              <a:extLst>
+                <a:ext uri="{FF2B5EF4-FFF2-40B4-BE49-F238E27FC236}">
+                  <a16:creationId xmlns:a16="http://schemas.microsoft.com/office/drawing/2014/main" id="{2530D07E-D6D1-398F-1738-EA39498F559A}"/>
+                </a:ext>
+              </a:extLst>
+            </p:cNvPr>
+            <p:cNvCxnSpPr>
+              <a:cxnSpLocks/>
+              <a:stCxn id="23" idx="0"/>
+            </p:cNvCxnSpPr>
+            <p:nvPr/>
+          </p:nvCxnSpPr>
+          <p:spPr>
+            <a:xfrm flipV="1">
+              <a:off x="515815" y="2350593"/>
+              <a:ext cx="160215" cy="234462"/>
+            </a:xfrm>
+            <a:prstGeom prst="straightConnector1">
+              <a:avLst/>
+            </a:prstGeom>
+            <a:ln>
+              <a:tailEnd type="triangle"/>
+            </a:ln>
+          </p:spPr>
+          <p:style>
+            <a:lnRef idx="2">
+              <a:schemeClr val="accent1"/>
+            </a:lnRef>
+            <a:fillRef idx="0">
+              <a:schemeClr val="accent1"/>
+            </a:fillRef>
+            <a:effectRef idx="1">
+              <a:schemeClr val="accent1"/>
+            </a:effectRef>
+            <a:fontRef idx="minor">
+              <a:schemeClr val="tx1"/>
+            </a:fontRef>
+          </p:style>
+        </p:cxnSp>
+        <p:sp>
+          <p:nvSpPr>
+            <p:cNvPr id="26" name="文本框 25">
+              <a:extLst>
+                <a:ext uri="{FF2B5EF4-FFF2-40B4-BE49-F238E27FC236}">
+                  <a16:creationId xmlns:a16="http://schemas.microsoft.com/office/drawing/2014/main" id="{938A0715-90D2-2BEA-5A80-12507A7648F3}"/>
+                </a:ext>
+              </a:extLst>
+            </p:cNvPr>
+            <p:cNvSpPr txBox="1"/>
+            <p:nvPr/>
+          </p:nvSpPr>
+          <p:spPr>
+            <a:xfrm>
+              <a:off x="676030" y="2665629"/>
+              <a:ext cx="550986" cy="523220"/>
+            </a:xfrm>
+            <a:prstGeom prst="rect">
+              <a:avLst/>
+            </a:prstGeom>
+            <a:noFill/>
+          </p:spPr>
+          <p:txBody>
+            <a:bodyPr wrap="square" rtlCol="0">
+              <a:spAutoFit/>
+            </a:bodyPr>
+            <a:lstStyle/>
+            <a:p>
+              <a:r>
+                <a:rPr lang="en-US" altLang="zh-CN" sz="1400" dirty="0"/>
+                <a:t>Gain lens</a:t>
+              </a:r>
+              <a:endParaRPr lang="zh-CN" altLang="en-US" sz="1400" dirty="0"/>
+            </a:p>
+          </p:txBody>
+        </p:sp>
+        <p:sp>
+          <p:nvSpPr>
+            <p:cNvPr id="27" name="文本框 26">
+              <a:extLst>
+                <a:ext uri="{FF2B5EF4-FFF2-40B4-BE49-F238E27FC236}">
+                  <a16:creationId xmlns:a16="http://schemas.microsoft.com/office/drawing/2014/main" id="{E74CBCA7-92DF-16B5-0416-87AB7D32C7DB}"/>
+                </a:ext>
+              </a:extLst>
+            </p:cNvPr>
+            <p:cNvSpPr txBox="1"/>
+            <p:nvPr/>
+          </p:nvSpPr>
+          <p:spPr>
+            <a:xfrm>
+              <a:off x="1168399" y="2665628"/>
+              <a:ext cx="812799" cy="369332"/>
+            </a:xfrm>
+            <a:prstGeom prst="rect">
+              <a:avLst/>
+            </a:prstGeom>
+            <a:noFill/>
+          </p:spPr>
+          <p:txBody>
+            <a:bodyPr wrap="square" rtlCol="0">
+              <a:spAutoFit/>
+            </a:bodyPr>
+            <a:lstStyle/>
+            <a:p>
+              <a:r>
+                <a:rPr lang="en-US" altLang="zh-CN" sz="1400" dirty="0"/>
+                <a:t>Zoom</a:t>
+              </a:r>
+              <a:r>
+                <a:rPr lang="en-US" altLang="zh-CN" dirty="0"/>
+                <a:t> </a:t>
+              </a:r>
+              <a:endParaRPr lang="zh-CN" altLang="en-US" dirty="0"/>
+            </a:p>
+          </p:txBody>
+        </p:sp>
+        <p:cxnSp>
+          <p:nvCxnSpPr>
+            <p:cNvPr id="30" name="直接箭头连接符 29">
+              <a:extLst>
+                <a:ext uri="{FF2B5EF4-FFF2-40B4-BE49-F238E27FC236}">
+                  <a16:creationId xmlns:a16="http://schemas.microsoft.com/office/drawing/2014/main" id="{96321F6A-A536-BB5E-A5F5-167044779F7E}"/>
+                </a:ext>
+              </a:extLst>
+            </p:cNvPr>
+            <p:cNvCxnSpPr>
+              <a:stCxn id="26" idx="0"/>
+            </p:cNvCxnSpPr>
+            <p:nvPr/>
+          </p:nvCxnSpPr>
+          <p:spPr>
+            <a:xfrm flipV="1">
+              <a:off x="951523" y="2461846"/>
+              <a:ext cx="41030" cy="203783"/>
+            </a:xfrm>
+            <a:prstGeom prst="straightConnector1">
+              <a:avLst/>
+            </a:prstGeom>
+            <a:ln>
+              <a:tailEnd type="triangle"/>
+            </a:ln>
+          </p:spPr>
+          <p:style>
+            <a:lnRef idx="2">
+              <a:schemeClr val="accent1"/>
+            </a:lnRef>
+            <a:fillRef idx="0">
+              <a:schemeClr val="accent1"/>
+            </a:fillRef>
+            <a:effectRef idx="1">
+              <a:schemeClr val="accent1"/>
+            </a:effectRef>
+            <a:fontRef idx="minor">
+              <a:schemeClr val="tx1"/>
+            </a:fontRef>
+          </p:style>
+        </p:cxnSp>
+        <p:cxnSp>
+          <p:nvCxnSpPr>
+            <p:cNvPr id="31" name="直接箭头连接符 30">
+              <a:extLst>
+                <a:ext uri="{FF2B5EF4-FFF2-40B4-BE49-F238E27FC236}">
+                  <a16:creationId xmlns:a16="http://schemas.microsoft.com/office/drawing/2014/main" id="{6CA744D6-FFD7-53FB-2EEA-46D53A8472BE}"/>
+                </a:ext>
+              </a:extLst>
+            </p:cNvPr>
+            <p:cNvCxnSpPr>
+              <a:cxnSpLocks/>
+            </p:cNvCxnSpPr>
+            <p:nvPr/>
+          </p:nvCxnSpPr>
+          <p:spPr>
+            <a:xfrm flipV="1">
+              <a:off x="1473201" y="2518581"/>
+              <a:ext cx="20515" cy="192103"/>
+            </a:xfrm>
+            <a:prstGeom prst="straightConnector1">
+              <a:avLst/>
+            </a:prstGeom>
+            <a:ln>
+              <a:tailEnd type="triangle"/>
+            </a:ln>
+          </p:spPr>
+          <p:style>
+            <a:lnRef idx="2">
+              <a:schemeClr val="accent1"/>
+            </a:lnRef>
+            <a:fillRef idx="0">
+              <a:schemeClr val="accent1"/>
+            </a:fillRef>
+            <a:effectRef idx="1">
+              <a:schemeClr val="accent1"/>
+            </a:effectRef>
+            <a:fontRef idx="minor">
+              <a:schemeClr val="tx1"/>
+            </a:fontRef>
+          </p:style>
+        </p:cxnSp>
+        <p:sp>
+          <p:nvSpPr>
+            <p:cNvPr id="33" name="文本框 32">
+              <a:extLst>
+                <a:ext uri="{FF2B5EF4-FFF2-40B4-BE49-F238E27FC236}">
+                  <a16:creationId xmlns:a16="http://schemas.microsoft.com/office/drawing/2014/main" id="{B88CA3B7-6D23-DFD4-2719-887BF1735268}"/>
+                </a:ext>
+              </a:extLst>
+            </p:cNvPr>
+            <p:cNvSpPr txBox="1"/>
+            <p:nvPr/>
+          </p:nvSpPr>
+          <p:spPr>
+            <a:xfrm>
+              <a:off x="2071073" y="1510268"/>
+              <a:ext cx="812799" cy="369332"/>
+            </a:xfrm>
+            <a:prstGeom prst="rect">
+              <a:avLst/>
+            </a:prstGeom>
+            <a:noFill/>
+          </p:spPr>
+          <p:txBody>
+            <a:bodyPr wrap="square" rtlCol="0">
+              <a:spAutoFit/>
+            </a:bodyPr>
+            <a:lstStyle/>
+            <a:p>
+              <a:r>
+                <a:rPr lang="en-US" altLang="zh-CN" sz="1400" dirty="0"/>
+                <a:t>mirror</a:t>
+              </a:r>
+              <a:r>
+                <a:rPr lang="en-US" altLang="zh-CN" dirty="0"/>
+                <a:t> </a:t>
+              </a:r>
+              <a:endParaRPr lang="zh-CN" altLang="en-US" dirty="0"/>
+            </a:p>
+          </p:txBody>
+        </p:sp>
+        <p:cxnSp>
+          <p:nvCxnSpPr>
+            <p:cNvPr id="34" name="直接箭头连接符 33">
+              <a:extLst>
+                <a:ext uri="{FF2B5EF4-FFF2-40B4-BE49-F238E27FC236}">
+                  <a16:creationId xmlns:a16="http://schemas.microsoft.com/office/drawing/2014/main" id="{C921243A-BA7C-0013-0A66-03301942FE17}"/>
+                </a:ext>
+              </a:extLst>
+            </p:cNvPr>
+            <p:cNvCxnSpPr>
+              <a:cxnSpLocks/>
+            </p:cNvCxnSpPr>
+            <p:nvPr/>
+          </p:nvCxnSpPr>
+          <p:spPr>
+            <a:xfrm flipH="1">
+              <a:off x="2016368" y="1879600"/>
+              <a:ext cx="240319" cy="402492"/>
+            </a:xfrm>
+            <a:prstGeom prst="straightConnector1">
+              <a:avLst/>
+            </a:prstGeom>
+            <a:ln>
+              <a:tailEnd type="triangle"/>
+            </a:ln>
+          </p:spPr>
+          <p:style>
+            <a:lnRef idx="2">
+              <a:schemeClr val="accent1"/>
+            </a:lnRef>
+            <a:fillRef idx="0">
+              <a:schemeClr val="accent1"/>
+            </a:fillRef>
+            <a:effectRef idx="1">
+              <a:schemeClr val="accent1"/>
+            </a:effectRef>
+            <a:fontRef idx="minor">
+              <a:schemeClr val="tx1"/>
+            </a:fontRef>
+          </p:style>
+        </p:cxnSp>
+        <p:sp>
+          <p:nvSpPr>
+            <p:cNvPr id="39" name="文本框 38">
+              <a:extLst>
+                <a:ext uri="{FF2B5EF4-FFF2-40B4-BE49-F238E27FC236}">
+                  <a16:creationId xmlns:a16="http://schemas.microsoft.com/office/drawing/2014/main" id="{32177742-7E42-4CAD-CE2C-792C65E530EC}"/>
+                </a:ext>
+              </a:extLst>
+            </p:cNvPr>
+            <p:cNvSpPr txBox="1"/>
+            <p:nvPr/>
+          </p:nvSpPr>
+          <p:spPr>
+            <a:xfrm>
+              <a:off x="1735979" y="3244334"/>
+              <a:ext cx="1147893" cy="369332"/>
+            </a:xfrm>
+            <a:prstGeom prst="rect">
+              <a:avLst/>
+            </a:prstGeom>
+            <a:noFill/>
+          </p:spPr>
+          <p:txBody>
+            <a:bodyPr wrap="square" rtlCol="0">
+              <a:spAutoFit/>
+            </a:bodyPr>
+            <a:lstStyle/>
+            <a:p>
+              <a:r>
+                <a:rPr lang="en-US" altLang="zh-CN" sz="1400" dirty="0"/>
+                <a:t>beamsplitter</a:t>
+              </a:r>
+              <a:r>
+                <a:rPr lang="en-US" altLang="zh-CN" dirty="0"/>
+                <a:t> </a:t>
+              </a:r>
+              <a:endParaRPr lang="zh-CN" altLang="en-US" dirty="0"/>
+            </a:p>
+          </p:txBody>
+        </p:sp>
+        <p:sp>
+          <p:nvSpPr>
+            <p:cNvPr id="40" name="文本框 39">
+              <a:extLst>
+                <a:ext uri="{FF2B5EF4-FFF2-40B4-BE49-F238E27FC236}">
+                  <a16:creationId xmlns:a16="http://schemas.microsoft.com/office/drawing/2014/main" id="{4FA66546-1F63-D9CA-FC36-4C9D94658C15}"/>
+                </a:ext>
+              </a:extLst>
+            </p:cNvPr>
+            <p:cNvSpPr txBox="1"/>
+            <p:nvPr/>
+          </p:nvSpPr>
+          <p:spPr>
+            <a:xfrm>
+              <a:off x="5814646" y="1140936"/>
+              <a:ext cx="1147893" cy="369332"/>
+            </a:xfrm>
+            <a:prstGeom prst="rect">
+              <a:avLst/>
+            </a:prstGeom>
+            <a:noFill/>
+          </p:spPr>
+          <p:txBody>
+            <a:bodyPr wrap="square" rtlCol="0">
+              <a:spAutoFit/>
+            </a:bodyPr>
+            <a:lstStyle/>
+            <a:p>
+              <a:r>
+                <a:rPr lang="en-US" altLang="zh-CN" sz="1400" dirty="0"/>
+                <a:t>1</a:t>
+              </a:r>
+              <a:r>
+                <a:rPr lang="en-US" altLang="zh-CN" sz="1400" baseline="30000" dirty="0"/>
+                <a:t>st</a:t>
+              </a:r>
+              <a:r>
+                <a:rPr lang="en-US" altLang="zh-CN" sz="1400" dirty="0"/>
+                <a:t> lens</a:t>
+              </a:r>
+              <a:r>
+                <a:rPr lang="en-US" altLang="zh-CN" dirty="0"/>
+                <a:t> </a:t>
+              </a:r>
+              <a:endParaRPr lang="zh-CN" altLang="en-US" dirty="0"/>
+            </a:p>
+          </p:txBody>
+        </p:sp>
+        <p:sp>
+          <p:nvSpPr>
+            <p:cNvPr id="41" name="文本框 40">
+              <a:extLst>
+                <a:ext uri="{FF2B5EF4-FFF2-40B4-BE49-F238E27FC236}">
+                  <a16:creationId xmlns:a16="http://schemas.microsoft.com/office/drawing/2014/main" id="{CE87B43F-D8F9-D1D2-2419-8B22405622D0}"/>
+                </a:ext>
+              </a:extLst>
+            </p:cNvPr>
+            <p:cNvSpPr txBox="1"/>
+            <p:nvPr/>
+          </p:nvSpPr>
+          <p:spPr>
+            <a:xfrm>
+              <a:off x="6643077" y="1202491"/>
+              <a:ext cx="820616" cy="307777"/>
+            </a:xfrm>
+            <a:prstGeom prst="rect">
+              <a:avLst/>
+            </a:prstGeom>
+            <a:noFill/>
+          </p:spPr>
+          <p:txBody>
+            <a:bodyPr wrap="square" rtlCol="0">
+              <a:spAutoFit/>
+            </a:bodyPr>
+            <a:lstStyle/>
+            <a:p>
+              <a:r>
+                <a:rPr lang="en-US" altLang="zh-CN" sz="1400" dirty="0"/>
+                <a:t>window</a:t>
+              </a:r>
+              <a:endParaRPr lang="zh-CN" altLang="en-US" dirty="0"/>
+            </a:p>
+          </p:txBody>
+        </p:sp>
+        <p:cxnSp>
+          <p:nvCxnSpPr>
+            <p:cNvPr id="42" name="直接箭头连接符 41">
+              <a:extLst>
+                <a:ext uri="{FF2B5EF4-FFF2-40B4-BE49-F238E27FC236}">
+                  <a16:creationId xmlns:a16="http://schemas.microsoft.com/office/drawing/2014/main" id="{AA47537F-9459-00A2-5DD6-FAFE2195DBC3}"/>
+                </a:ext>
+              </a:extLst>
+            </p:cNvPr>
+            <p:cNvCxnSpPr/>
+            <p:nvPr/>
+          </p:nvCxnSpPr>
+          <p:spPr>
+            <a:xfrm flipV="1">
+              <a:off x="2136527" y="3142442"/>
+              <a:ext cx="41030" cy="203783"/>
+            </a:xfrm>
+            <a:prstGeom prst="straightConnector1">
+              <a:avLst/>
+            </a:prstGeom>
+            <a:ln>
+              <a:tailEnd type="triangle"/>
+            </a:ln>
+          </p:spPr>
+          <p:style>
+            <a:lnRef idx="2">
+              <a:schemeClr val="accent1"/>
+            </a:lnRef>
+            <a:fillRef idx="0">
+              <a:schemeClr val="accent1"/>
+            </a:fillRef>
+            <a:effectRef idx="1">
+              <a:schemeClr val="accent1"/>
+            </a:effectRef>
+            <a:fontRef idx="minor">
+              <a:schemeClr val="tx1"/>
+            </a:fontRef>
+          </p:style>
+        </p:cxnSp>
+        <p:cxnSp>
+          <p:nvCxnSpPr>
+            <p:cNvPr id="45" name="直接箭头连接符 44">
+              <a:extLst>
+                <a:ext uri="{FF2B5EF4-FFF2-40B4-BE49-F238E27FC236}">
+                  <a16:creationId xmlns:a16="http://schemas.microsoft.com/office/drawing/2014/main" id="{534164D6-3CC3-AB87-6091-749C1F355E89}"/>
+                </a:ext>
+              </a:extLst>
+            </p:cNvPr>
+            <p:cNvCxnSpPr>
+              <a:cxnSpLocks/>
+            </p:cNvCxnSpPr>
+            <p:nvPr/>
+          </p:nvCxnSpPr>
+          <p:spPr>
+            <a:xfrm>
+              <a:off x="6096000" y="1453662"/>
+              <a:ext cx="45923" cy="132861"/>
+            </a:xfrm>
+            <a:prstGeom prst="straightConnector1">
+              <a:avLst/>
+            </a:prstGeom>
+            <a:ln>
+              <a:tailEnd type="triangle"/>
+            </a:ln>
+          </p:spPr>
+          <p:style>
+            <a:lnRef idx="2">
+              <a:schemeClr val="accent1"/>
+            </a:lnRef>
+            <a:fillRef idx="0">
+              <a:schemeClr val="accent1"/>
+            </a:fillRef>
+            <a:effectRef idx="1">
+              <a:schemeClr val="accent1"/>
+            </a:effectRef>
+            <a:fontRef idx="minor">
+              <a:schemeClr val="tx1"/>
+            </a:fontRef>
+          </p:style>
+        </p:cxnSp>
+        <p:cxnSp>
+          <p:nvCxnSpPr>
+            <p:cNvPr id="49" name="直接箭头连接符 48">
+              <a:extLst>
+                <a:ext uri="{FF2B5EF4-FFF2-40B4-BE49-F238E27FC236}">
+                  <a16:creationId xmlns:a16="http://schemas.microsoft.com/office/drawing/2014/main" id="{9F322989-F253-EE79-43C6-56E4FC8AAF24}"/>
+                </a:ext>
+              </a:extLst>
+            </p:cNvPr>
+            <p:cNvCxnSpPr>
+              <a:cxnSpLocks/>
+            </p:cNvCxnSpPr>
+            <p:nvPr/>
+          </p:nvCxnSpPr>
+          <p:spPr>
+            <a:xfrm>
+              <a:off x="6903923" y="1453662"/>
+              <a:ext cx="0" cy="241272"/>
+            </a:xfrm>
+            <a:prstGeom prst="straightConnector1">
+              <a:avLst/>
+            </a:prstGeom>
+            <a:ln>
+              <a:tailEnd type="triangle"/>
+            </a:ln>
+          </p:spPr>
+          <p:style>
+            <a:lnRef idx="2">
+              <a:schemeClr val="accent1"/>
+            </a:lnRef>
+            <a:fillRef idx="0">
+              <a:schemeClr val="accent1"/>
+            </a:fillRef>
+            <a:effectRef idx="1">
+              <a:schemeClr val="accent1"/>
+            </a:effectRef>
+            <a:fontRef idx="minor">
+              <a:schemeClr val="tx1"/>
+            </a:fontRef>
+          </p:style>
+        </p:cxnSp>
+        <p:sp>
+          <p:nvSpPr>
+            <p:cNvPr id="53" name="文本框 52">
+              <a:extLst>
+                <a:ext uri="{FF2B5EF4-FFF2-40B4-BE49-F238E27FC236}">
+                  <a16:creationId xmlns:a16="http://schemas.microsoft.com/office/drawing/2014/main" id="{754232A4-E8EB-A4E6-BAB6-443C50ACF5E1}"/>
+                </a:ext>
+              </a:extLst>
+            </p:cNvPr>
+            <p:cNvSpPr txBox="1"/>
+            <p:nvPr/>
+          </p:nvSpPr>
+          <p:spPr>
+            <a:xfrm>
+              <a:off x="9879625" y="2210804"/>
+              <a:ext cx="1163514" cy="307777"/>
+            </a:xfrm>
+            <a:prstGeom prst="rect">
+              <a:avLst/>
+            </a:prstGeom>
+            <a:noFill/>
+          </p:spPr>
+          <p:txBody>
+            <a:bodyPr wrap="square" rtlCol="0">
+              <a:spAutoFit/>
+            </a:bodyPr>
+            <a:lstStyle/>
+            <a:p>
+              <a:r>
+                <a:rPr lang="en-US" altLang="zh-CN" sz="1400" dirty="0"/>
+                <a:t>Cutoff layer</a:t>
+              </a:r>
+              <a:endParaRPr lang="zh-CN" altLang="en-US" dirty="0"/>
+            </a:p>
+          </p:txBody>
+        </p:sp>
+        <p:cxnSp>
+          <p:nvCxnSpPr>
+            <p:cNvPr id="55" name="直接箭头连接符 54">
+              <a:extLst>
+                <a:ext uri="{FF2B5EF4-FFF2-40B4-BE49-F238E27FC236}">
+                  <a16:creationId xmlns:a16="http://schemas.microsoft.com/office/drawing/2014/main" id="{33DFADC1-BD64-0709-21A2-A1E42BDC306A}"/>
+                </a:ext>
+              </a:extLst>
+            </p:cNvPr>
+            <p:cNvCxnSpPr>
+              <a:cxnSpLocks/>
+            </p:cNvCxnSpPr>
+            <p:nvPr/>
+          </p:nvCxnSpPr>
+          <p:spPr>
+            <a:xfrm flipH="1">
+              <a:off x="9761169" y="2518581"/>
+              <a:ext cx="434979" cy="137675"/>
+            </a:xfrm>
+            <a:prstGeom prst="straightConnector1">
+              <a:avLst/>
+            </a:prstGeom>
+            <a:ln>
+              <a:tailEnd type="triangle"/>
+            </a:ln>
+          </p:spPr>
+          <p:style>
+            <a:lnRef idx="2">
+              <a:schemeClr val="accent1"/>
+            </a:lnRef>
+            <a:fillRef idx="0">
+              <a:schemeClr val="accent1"/>
+            </a:fillRef>
+            <a:effectRef idx="1">
+              <a:schemeClr val="accent1"/>
+            </a:effectRef>
+            <a:fontRef idx="minor">
+              <a:schemeClr val="tx1"/>
+            </a:fontRef>
+          </p:style>
+        </p:cxnSp>
+      </p:grpSp>
+    </p:spTree>
+    <p:extLst>
+      <p:ext uri="{BB962C8B-B14F-4D97-AF65-F5344CB8AC3E}">
+        <p14:creationId xmlns:p14="http://schemas.microsoft.com/office/powerpoint/2010/main" val="1623930502"/>
+      </p:ext>
+    </p:extLst>
+  </p:cSld>
+  <p:clrMapOvr>
+    <a:masterClrMapping/>
+  </p:clrMapOvr>
+</p:sld>
+</file>
+
+<file path=ppt/slides/slide4.xml><?xml version="1.0" encoding="utf-8"?>
+<p:sld xmlns:a="http://schemas.openxmlformats.org/drawingml/2006/main" xmlns:r="http://schemas.openxmlformats.org/officeDocument/2006/relationships" xmlns:p="http://schemas.openxmlformats.org/presentationml/2006/main">
+  <p:cSld>
+    <p:spTree>
+      <p:nvGrpSpPr>
+        <p:cNvPr id="1" name=""/>
+        <p:cNvGrpSpPr/>
+        <p:nvPr/>
+      </p:nvGrpSpPr>
+      <p:grpSpPr>
+        <a:xfrm>
+          <a:off x="0" y="0"/>
+          <a:ext cx="0" cy="0"/>
+          <a:chOff x="0" y="0"/>
+          <a:chExt cx="0" cy="0"/>
+        </a:xfrm>
+      </p:grpSpPr>
+      <p:grpSp>
+        <p:nvGrpSpPr>
+          <p:cNvPr id="12" name="组合 11">
+            <a:extLst>
+              <a:ext uri="{FF2B5EF4-FFF2-40B4-BE49-F238E27FC236}">
+                <a16:creationId xmlns:a16="http://schemas.microsoft.com/office/drawing/2014/main" id="{53C3C1CE-A2F1-0D14-FAA7-7716DD094110}"/>
+              </a:ext>
+            </a:extLst>
+          </p:cNvPr>
+          <p:cNvGrpSpPr/>
+          <p:nvPr/>
+        </p:nvGrpSpPr>
+        <p:grpSpPr>
+          <a:xfrm>
+            <a:off x="453293" y="640861"/>
+            <a:ext cx="10832124" cy="4126524"/>
+            <a:chOff x="164123" y="976923"/>
+            <a:chExt cx="10832124" cy="4126524"/>
+          </a:xfrm>
+        </p:grpSpPr>
+        <p:grpSp>
+          <p:nvGrpSpPr>
+            <p:cNvPr id="6" name="组合 5">
+              <a:extLst>
+                <a:ext uri="{FF2B5EF4-FFF2-40B4-BE49-F238E27FC236}">
+                  <a16:creationId xmlns:a16="http://schemas.microsoft.com/office/drawing/2014/main" id="{FF947A7A-005E-DC7F-5C3A-988298034D06}"/>
+                </a:ext>
+              </a:extLst>
+            </p:cNvPr>
+            <p:cNvGrpSpPr/>
+            <p:nvPr/>
+          </p:nvGrpSpPr>
+          <p:grpSpPr>
+            <a:xfrm>
+              <a:off x="164123" y="1041400"/>
+              <a:ext cx="10832124" cy="4062047"/>
+              <a:chOff x="164123" y="1041400"/>
+              <a:chExt cx="10832124" cy="4062047"/>
+            </a:xfrm>
+          </p:grpSpPr>
+          <p:pic>
+            <p:nvPicPr>
+              <p:cNvPr id="3" name="图片 2">
+                <a:extLst>
+                  <a:ext uri="{FF2B5EF4-FFF2-40B4-BE49-F238E27FC236}">
+                    <a16:creationId xmlns:a16="http://schemas.microsoft.com/office/drawing/2014/main" id="{B466C5DB-C04E-FCF6-F002-1626D20A950E}"/>
+                  </a:ext>
+                </a:extLst>
+              </p:cNvPr>
+              <p:cNvPicPr>
+                <a:picLocks noChangeAspect="1"/>
+              </p:cNvPicPr>
+              <p:nvPr/>
+            </p:nvPicPr>
+            <p:blipFill>
+              <a:blip r:embed="rId2"/>
+              <a:stretch>
+                <a:fillRect/>
+              </a:stretch>
+            </p:blipFill>
+            <p:spPr>
+              <a:xfrm>
+                <a:off x="5580185" y="1041400"/>
+                <a:ext cx="5416062" cy="4062047"/>
+              </a:xfrm>
+              <a:prstGeom prst="rect">
+                <a:avLst/>
+              </a:prstGeom>
+            </p:spPr>
+          </p:pic>
+          <p:pic>
+            <p:nvPicPr>
+              <p:cNvPr id="5" name="图片 4">
+                <a:extLst>
+                  <a:ext uri="{FF2B5EF4-FFF2-40B4-BE49-F238E27FC236}">
+                    <a16:creationId xmlns:a16="http://schemas.microsoft.com/office/drawing/2014/main" id="{C179C49F-DF35-A2D0-FFCC-4F118833BC54}"/>
+                  </a:ext>
+                </a:extLst>
+              </p:cNvPr>
+              <p:cNvPicPr>
+                <a:picLocks noChangeAspect="1"/>
+              </p:cNvPicPr>
+              <p:nvPr/>
+            </p:nvPicPr>
+            <p:blipFill>
+              <a:blip r:embed="rId3"/>
+              <a:stretch>
+                <a:fillRect/>
+              </a:stretch>
+            </p:blipFill>
+            <p:spPr>
+              <a:xfrm>
+                <a:off x="164123" y="1041400"/>
+                <a:ext cx="5416062" cy="4062047"/>
+              </a:xfrm>
+              <a:prstGeom prst="rect">
+                <a:avLst/>
+              </a:prstGeom>
+            </p:spPr>
+          </p:pic>
+        </p:grpSp>
+        <p:sp>
+          <p:nvSpPr>
+            <p:cNvPr id="9" name="文本框 8">
+              <a:extLst>
+                <a:ext uri="{FF2B5EF4-FFF2-40B4-BE49-F238E27FC236}">
+                  <a16:creationId xmlns:a16="http://schemas.microsoft.com/office/drawing/2014/main" id="{9A2AC4C5-1B6C-521C-98E8-263352E5CFE0}"/>
+                </a:ext>
+              </a:extLst>
+            </p:cNvPr>
+            <p:cNvSpPr txBox="1"/>
+            <p:nvPr/>
+          </p:nvSpPr>
+          <p:spPr>
+            <a:xfrm>
+              <a:off x="519723" y="976923"/>
+              <a:ext cx="414215" cy="369332"/>
+            </a:xfrm>
+            <a:prstGeom prst="rect">
+              <a:avLst/>
+            </a:prstGeom>
+            <a:noFill/>
+          </p:spPr>
+          <p:txBody>
+            <a:bodyPr wrap="square" rtlCol="0">
+              <a:spAutoFit/>
+            </a:bodyPr>
+            <a:lstStyle/>
+            <a:p>
+              <a:r>
+                <a:rPr lang="en-US" altLang="zh-CN" dirty="0"/>
+                <a:t>(a)</a:t>
+              </a:r>
+              <a:endParaRPr lang="zh-CN" altLang="en-US" dirty="0"/>
+            </a:p>
+          </p:txBody>
+        </p:sp>
+        <p:sp>
+          <p:nvSpPr>
+            <p:cNvPr id="11" name="文本框 10">
+              <a:extLst>
+                <a:ext uri="{FF2B5EF4-FFF2-40B4-BE49-F238E27FC236}">
+                  <a16:creationId xmlns:a16="http://schemas.microsoft.com/office/drawing/2014/main" id="{B926A49B-3493-EF9C-5055-456D5CD4CBAF}"/>
+                </a:ext>
+              </a:extLst>
+            </p:cNvPr>
+            <p:cNvSpPr txBox="1"/>
+            <p:nvPr/>
+          </p:nvSpPr>
+          <p:spPr>
+            <a:xfrm>
+              <a:off x="6053015" y="976923"/>
+              <a:ext cx="414215" cy="369332"/>
+            </a:xfrm>
+            <a:prstGeom prst="rect">
+              <a:avLst/>
+            </a:prstGeom>
+            <a:noFill/>
+          </p:spPr>
+          <p:txBody>
+            <a:bodyPr wrap="square" rtlCol="0">
+              <a:spAutoFit/>
+            </a:bodyPr>
+            <a:lstStyle/>
+            <a:p>
+              <a:r>
+                <a:rPr lang="en-US" altLang="zh-CN" dirty="0"/>
+                <a:t>(b)</a:t>
+              </a:r>
+              <a:endParaRPr lang="zh-CN" altLang="en-US" dirty="0"/>
+            </a:p>
+          </p:txBody>
+        </p:sp>
+      </p:grpSp>
+    </p:spTree>
+    <p:extLst>
+      <p:ext uri="{BB962C8B-B14F-4D97-AF65-F5344CB8AC3E}">
+        <p14:creationId xmlns:p14="http://schemas.microsoft.com/office/powerpoint/2010/main" val="4242879195"/>
       </p:ext>
     </p:extLst>
   </p:cSld>
